--- a/Team 4 NLP Case Study Presentation (LegalLens).pptx
+++ b/Team 4 NLP Case Study Presentation (LegalLens).pptx
@@ -23997,7 +23997,7 @@
               <a:tabLst/>
             </a:pPr>
             <a:r>
-              <a:rPr kumimoji="0" lang="en-US" altLang="en-US" sz="2500" b="1" u="none" strike="noStrike" cap="none" normalizeH="0" baseline="0">
+              <a:rPr kumimoji="0" lang="en-US" altLang="en-US" sz="2500" b="1" u="none" strike="noStrike" cap="none" normalizeH="0" baseline="0" dirty="0">
                 <a:ln>
                   <a:noFill/>
                 </a:ln>
@@ -24011,7 +24011,7 @@
               <a:t>Abstract</a:t>
             </a:r>
             <a:r>
-              <a:rPr kumimoji="0" lang="en-US" altLang="en-US" sz="2200" b="1" u="none" strike="noStrike" cap="none" normalizeH="0" baseline="0">
+              <a:rPr kumimoji="0" lang="en-US" altLang="en-US" sz="2200" b="1" u="none" strike="noStrike" cap="none" normalizeH="0" baseline="0" dirty="0">
                 <a:ln>
                   <a:noFill/>
                 </a:ln>
@@ -24024,7 +24024,7 @@
               </a:rPr>
               <a:t>:</a:t>
             </a:r>
-            <a:endParaRPr lang="en-US" altLang="en-US" sz="2200" b="1" u="none" strike="noStrike" cap="none" normalizeH="0" baseline="0">
+            <a:endParaRPr lang="en-US" altLang="en-US" sz="2200" b="1" u="none" strike="noStrike" cap="none" normalizeH="0" baseline="0" dirty="0">
               <a:ln>
                 <a:noFill/>
               </a:ln>
@@ -24038,7 +24038,7 @@
           </a:p>
           <a:p>
             <a:r>
-              <a:rPr lang="en-US" sz="1500" b="1">
+              <a:rPr lang="en-US" sz="1500" b="1" dirty="0">
                 <a:solidFill>
                   <a:schemeClr val="tx1"/>
                 </a:solidFill>
@@ -24048,7 +24048,7 @@
               <a:t>Context: </a:t>
             </a:r>
             <a:r>
-              <a:rPr lang="en-US" sz="1500">
+              <a:rPr lang="en-US" sz="1500" dirty="0">
                 <a:solidFill>
                   <a:schemeClr val="tx1"/>
                 </a:solidFill>
@@ -24058,7 +24058,7 @@
               <a:t>The Indian judicial system faces a severe backlog of over 51 million pending cases, largely due to the time-intensive process of manual legal research and analysis of lengthy, complex documents. Legal texts pose significant challenges for Natural Language Processing (NLP) because of their intricate structure, domain-specific language, and the need for factually accurate, coherent summaries. Existing summarization approaches struggle with long documents, hallucinations, and accessibility for non-legal users. To address these issues, this project proposes a novel legal document summarization system that simplifies and democratizes access to legal information, supporting </a:t>
             </a:r>
             <a:r>
-              <a:rPr lang="en-US" sz="1500" b="1">
+              <a:rPr lang="en-US" sz="1500" b="1" dirty="0">
                 <a:solidFill>
                   <a:schemeClr val="tx1"/>
                 </a:solidFill>
@@ -24068,7 +24068,7 @@
               <a:t>SDG 16 (Peace, Justice, and Strong Institutions)</a:t>
             </a:r>
             <a:r>
-              <a:rPr lang="en-US" sz="1500">
+              <a:rPr lang="en-US" sz="1500" dirty="0">
                 <a:solidFill>
                   <a:schemeClr val="tx1"/>
                 </a:solidFill>
@@ -24078,7 +24078,7 @@
               <a:t>, particularly </a:t>
             </a:r>
             <a:r>
-              <a:rPr lang="en-US" sz="1500" b="1">
+              <a:rPr lang="en-US" sz="1500" b="1" dirty="0">
                 <a:solidFill>
                   <a:schemeClr val="tx1"/>
                 </a:solidFill>
@@ -24088,7 +24088,7 @@
               <a:t>Target 16.3</a:t>
             </a:r>
             <a:r>
-              <a:rPr lang="en-US" sz="1500">
+              <a:rPr lang="en-US" sz="1500" dirty="0">
                 <a:solidFill>
                   <a:schemeClr val="tx1"/>
                 </a:solidFill>
